--- a/day_9x_stakeholder_deck.pptx
+++ b/day_9x_stakeholder_deck.pptx
@@ -15,6 +15,9 @@
     <p:sldId id="263" r:id="rId14"/>
     <p:sldId id="264" r:id="rId15"/>
     <p:sldId id="265" r:id="rId16"/>
+    <p:sldId id="266" r:id="rId17"/>
+    <p:sldId id="267" r:id="rId18"/>
+    <p:sldId id="268" r:id="rId19"/>
   </p:sldIdLst>
   <p:sldSz cx="12191695" cy="6858000" type="screen4x3"/>
   <p:notesSz cx="6858000" cy="9144000"/>
@@ -3149,6 +3152,17 @@
             </a:r>
           </a:p>
           <a:p>
+            <a:r>
+              <a:rPr sz="1300" b="1" i="0">
+                <a:solidFill>
+                  <a:srgbClr val="10B981"/>
+                </a:solidFill>
+                <a:latin typeface="Segoe UI"/>
+              </a:rPr>
+              <a:t>v2.0 · the knowledge miner</a:t>
+            </a:r>
+          </a:p>
+          <a:p>
             <a:pPr>
               <a:spcBef>
                 <a:spcPts val="1800"/>
@@ -3191,127 +3205,6 @@
 </file>
 
 <file path=ppt/slides/slide10.xml><?xml version="1.0" encoding="utf-8"?>
-<p:sld xmlns:a="http://schemas.openxmlformats.org/drawingml/2006/main" xmlns:p="http://schemas.openxmlformats.org/presentationml/2006/main" xmlns:r="http://schemas.openxmlformats.org/officeDocument/2006/relationships">
-  <p:cSld>
-    <p:bg>
-      <p:bgPr>
-        <a:solidFill>
-          <a:srgbClr val="10B981"/>
-        </a:solidFill>
-        <a:effectLst/>
-      </p:bgPr>
-    </p:bg>
-    <p:spTree>
-      <p:nvGrpSpPr>
-        <p:cNvPr id="1" name=""/>
-        <p:cNvGrpSpPr/>
-        <p:nvPr/>
-      </p:nvGrpSpPr>
-      <p:grpSpPr/>
-      <p:sp>
-        <p:nvSpPr>
-          <p:cNvPr id="2" name="TextBox 1"/>
-          <p:cNvSpPr txBox="1"/>
-          <p:nvPr/>
-        </p:nvSpPr>
-        <p:spPr>
-          <a:xfrm>
-            <a:off x="822960" y="2560320"/>
-            <a:ext cx="10515600" cy="1828800"/>
-          </a:xfrm>
-          <a:prstGeom prst="rect">
-            <a:avLst/>
-          </a:prstGeom>
-          <a:noFill/>
-        </p:spPr>
-        <p:txBody>
-          <a:bodyPr wrap="square">
-            <a:spAutoFit/>
-          </a:bodyPr>
-          <a:lstStyle/>
-          <a:p>
-            <a:r>
-              <a:rPr sz="1500" b="1" i="0">
-                <a:solidFill>
-                  <a:srgbClr val="E0E7FF"/>
-                </a:solidFill>
-                <a:latin typeface="Segoe UI"/>
-              </a:rPr>
-              <a:t>THE CLOSE</a:t>
-            </a:r>
-          </a:p>
-          <a:p>
-            <a:r>
-              <a:rPr sz="3400" b="1" i="0">
-                <a:solidFill>
-                  <a:srgbClr val="FFFFFF"/>
-                </a:solidFill>
-                <a:latin typeface="Segoe UI"/>
-              </a:rPr>
-              <a:t>Not a job-loss story — a promotion story</a:t>
-            </a:r>
-          </a:p>
-        </p:txBody>
-      </p:sp>
-      <p:sp>
-        <p:nvSpPr>
-          <p:cNvPr id="3" name="TextBox 2"/>
-          <p:cNvSpPr txBox="1"/>
-          <p:nvPr/>
-        </p:nvSpPr>
-        <p:spPr>
-          <a:xfrm>
-            <a:off x="822960" y="4206240"/>
-            <a:ext cx="10515600" cy="1828800"/>
-          </a:xfrm>
-          <a:prstGeom prst="rect">
-            <a:avLst/>
-          </a:prstGeom>
-          <a:noFill/>
-        </p:spPr>
-        <p:txBody>
-          <a:bodyPr wrap="square">
-            <a:spAutoFit/>
-          </a:bodyPr>
-          <a:lstStyle/>
-          <a:p>
-            <a:r>
-              <a:rPr sz="1800" b="0" i="0">
-                <a:solidFill>
-                  <a:srgbClr val="FFFFFF"/>
-                </a:solidFill>
-                <a:latin typeface="Segoe UI"/>
-              </a:rPr>
-              <a:t>In this story the AI is the junior. Your people are the mentors, the reviewers, the ones who decide. We're applying the management playbook they already trust — to a new kind of teammate.</a:t>
-            </a:r>
-          </a:p>
-          <a:p>
-            <a:pPr>
-              <a:spcBef>
-                <a:spcPts val="1400"/>
-              </a:spcBef>
-            </a:pPr>
-            <a:r>
-              <a:rPr sz="1100" b="0" i="1">
-                <a:solidFill>
-                  <a:srgbClr val="D1FAE5"/>
-                </a:solidFill>
-                <a:latin typeface="Segoe UI"/>
-              </a:rPr>
-              <a:t>Onboarding framework adapted from Michael D. Watkins, *The First 90 Days* (Harvard Business School Press, 2003). Frameworks paraphrased with attribution; no book text reproduced.</a:t>
-            </a:r>
-          </a:p>
-        </p:txBody>
-      </p:sp>
-    </p:spTree>
-  </p:cSld>
-  <p:clrMapOvr>
-    <a:masterClrMapping/>
-  </p:clrMapOvr>
-</p:sld>
-</file>
-
-<file path=ppt/slides/slide2.xml><?xml version="1.0" encoding="utf-8"?>
 <p:sld xmlns:a="http://schemas.openxmlformats.org/drawingml/2006/main" xmlns:p="http://schemas.openxmlformats.org/presentationml/2006/main" xmlns:r="http://schemas.openxmlformats.org/officeDocument/2006/relationships">
   <p:cSld>
     <p:bg>
@@ -3376,7 +3269,7 @@
                 </a:solidFill>
                 <a:latin typeface="Segoe UI"/>
               </a:rPr>
-              <a:t>The reframe</a:t>
+              <a:t>Trust is earned per task class — and revocable</a:t>
             </a:r>
           </a:p>
         </p:txBody>
@@ -3409,13 +3302,13 @@
               </a:spcAft>
             </a:pPr>
             <a:r>
-              <a:rPr sz="1800" b="1" i="0">
-                <a:solidFill>
-                  <a:srgbClr val="0F172A"/>
-                </a:solidFill>
-                <a:latin typeface="Segoe UI"/>
-              </a:rPr>
-              <a:t>•  An AI agent is the fastest-learning new hire you'll ever get — it reads a million pages before Monday.</a:t>
+              <a:rPr sz="1800" b="0" i="0">
+                <a:solidFill>
+                  <a:srgbClr val="6366F1"/>
+                </a:solidFill>
+                <a:latin typeface="Segoe UI"/>
+              </a:rPr>
+              <a:t>•  SHADOW — drafts only, 100% reviewed, zero autonomy.</a:t>
             </a:r>
           </a:p>
           <a:p>
@@ -3425,13 +3318,13 @@
               </a:spcAft>
             </a:pPr>
             <a:r>
-              <a:rPr sz="1800" b="1" i="0">
-                <a:solidFill>
-                  <a:srgbClr val="0F172A"/>
-                </a:solidFill>
-                <a:latin typeface="Segoe UI"/>
-              </a:rPr>
-              <a:t>•  And it shows up with zero context about YOUR business: your process, your naming, your unwritten rules.</a:t>
+              <a:rPr sz="1800" b="0" i="0">
+                <a:solidFill>
+                  <a:srgbClr val="0EA5E9"/>
+                </a:solidFill>
+                <a:latin typeface="Segoe UI"/>
+              </a:rPr>
+              <a:t>•  GATED — may act, but every output needs the buddy's approval; unlocked when the class passes its eval gate.</a:t>
             </a:r>
           </a:p>
           <a:p>
@@ -3443,11 +3336,11 @@
             <a:r>
               <a:rPr sz="1800" b="0" i="0">
                 <a:solidFill>
-                  <a:srgbClr val="6366F1"/>
-                </a:solidFill>
-                <a:latin typeface="Segoe UI"/>
-              </a:rPr>
-              <a:t>•  Talent was never the gap. Context is.</a:t>
+                  <a:srgbClr val="10B981"/>
+                </a:solidFill>
+                <a:latin typeface="Segoe UI"/>
+              </a:rPr>
+              <a:t>•  AUTONOMOUS — acts within the charter; ~20% audit sample; offered only with a green gate AND enough verified outputs.</a:t>
             </a:r>
           </a:p>
           <a:p>
@@ -3457,13 +3350,13 @@
               </a:spcAft>
             </a:pPr>
             <a:r>
-              <a:rPr sz="1800" b="0" i="0">
-                <a:solidFill>
-                  <a:srgbClr val="10B981"/>
-                </a:solidFill>
-                <a:latin typeface="Segoe UI"/>
-              </a:rPr>
-              <a:t>•  So the question isn't 'which model' — it's 'are we a team that knows how to onboard?'</a:t>
+              <a:rPr sz="1800" b="1" i="0">
+                <a:solidFill>
+                  <a:srgbClr val="0F172A"/>
+                </a:solidFill>
+                <a:latin typeface="Segoe UI"/>
+              </a:rPr>
+              <a:t>•  A human junior earns social trust; an agent earns statistical trust. The probation review can expand, hold, or reduce — the same 90-day decision you'd make for a person.</a:t>
             </a:r>
           </a:p>
         </p:txBody>
@@ -3497,7 +3390,7 @@
                 </a:solidFill>
                 <a:latin typeface="Segoe UI"/>
               </a:rPr>
-              <a:t>This is the 'trapped enterprise knowledge' thesis, arriving through the side door.</a:t>
+              <a:t>What stays human, in writing: regulatory sign-off, stakeholder calls, ambiguous judgement, accountability.</a:t>
             </a:r>
           </a:p>
         </p:txBody>
@@ -3510,7 +3403,7 @@
 </p:sld>
 </file>
 
-<file path=ppt/slides/slide3.xml><?xml version="1.0" encoding="utf-8"?>
+<file path=ppt/slides/slide11.xml><?xml version="1.0" encoding="utf-8"?>
 <p:sld xmlns:a="http://schemas.openxmlformats.org/drawingml/2006/main" xmlns:p="http://schemas.openxmlformats.org/presentationml/2006/main" xmlns:r="http://schemas.openxmlformats.org/officeDocument/2006/relationships">
   <p:cSld>
     <p:bg>
@@ -3575,7 +3468,7 @@
                 </a:solidFill>
                 <a:latin typeface="Segoe UI"/>
               </a:rPr>
-              <a:t>Why onboarding — not the model — decides the outcome</a:t>
+              <a:t>One team — what each human gets back</a:t>
             </a:r>
           </a:p>
         </p:txBody>
@@ -3608,13 +3501,13 @@
               </a:spcAft>
             </a:pPr>
             <a:r>
-              <a:rPr sz="1800" b="0" i="0">
-                <a:solidFill>
-                  <a:srgbClr val="10B981"/>
-                </a:solidFill>
-                <a:latin typeface="Segoe UI"/>
-              </a:rPr>
-              <a:t>•  Onboarded like a junior teammate (scoped tasks, a reviewing buddy, trust earned task by task): one vendor's merge rate rose 34% → 67% over 18 months.</a:t>
+              <a:rPr sz="1800" b="1" i="0">
+                <a:solidFill>
+                  <a:srgbClr val="0F172A"/>
+                </a:solidFill>
+                <a:latin typeface="Segoe UI"/>
+              </a:rPr>
+              <a:t>•  In this story the AI is the junior; the humans are the mentors, reviewers and deciders. Every hour Kai returns is redeployed toward the review-and-judgement work that was always understaffed.</a:t>
             </a:r>
           </a:p>
           <a:p>
@@ -3626,11 +3519,11 @@
             <a:r>
               <a:rPr sz="1800" b="0" i="0">
                 <a:solidFill>
-                  <a:srgbClr val="EF4444"/>
-                </a:solidFill>
-                <a:latin typeface="Segoe UI"/>
-              </a:rPr>
-              <a:t>•  Thrown in the deep end: an independent trial completed 3 of 20 tasks — the failure cause was silent, unpredictable behaviour, not raw error rate.</a:t>
+                  <a:srgbClr val="6366F1"/>
+                </a:solidFill>
+                <a:latin typeface="Segoe UI"/>
+              </a:rPr>
+              <a:t>•  Over a modelled turnaround run, Kai returns ~432 analyst-hours to named teammates — Priya (triage), Arun (recon), Sofia (DQ) — who shift from doing the routine work to reviewing and directing it.</a:t>
             </a:r>
           </a:p>
           <a:p>
@@ -3646,7 +3539,23 @@
                 </a:solidFill>
                 <a:latin typeface="Segoe UI"/>
               </a:rPr>
-              <a:t>•  Watkins: a mid-level human hire takes ~6.2 months to break even; senior outside hires fail 40–50% of the time. The AI teammate is the ultimate OUTSIDE hire — highest risk, zero informal network — so it needs the MOST structured onboarding, not the least.</a:t>
+              <a:t>•  The 'stays human' list is written down, not implied: regulatory sign-off, stakeholder calls, ambiguous judgement, accountability.</a:t>
+            </a:r>
+          </a:p>
+          <a:p>
+            <a:pPr>
+              <a:spcAft>
+                <a:spcPts val="800"/>
+              </a:spcAft>
+            </a:pPr>
+            <a:r>
+              <a:rPr sz="1800" b="0" i="0">
+                <a:solidFill>
+                  <a:srgbClr val="10B981"/>
+                </a:solidFill>
+                <a:latin typeface="Segoe UI"/>
+              </a:rPr>
+              <a:t>•  Resist FTE-equivalence math in year one — measure task-class throughput, quality and cycle time. The workforce story is redeployment, not reduction.</a:t>
             </a:r>
           </a:p>
         </p:txBody>
@@ -3680,7 +3589,7 @@
                 </a:solidFill>
                 <a:latin typeface="Segoe UI"/>
               </a:rPr>
-              <a:t>Sources tracked in the POV EVIDENCE file; vendor figures flagged as vendor-reported.</a:t>
+              <a:t>G3 answered in the product, not just the pitch: the 52%-job-fear stat met with a per-person impact view and a written human-value-preservation list.</a:t>
             </a:r>
           </a:p>
         </p:txBody>
@@ -3693,78 +3602,7 @@
 </p:sld>
 </file>
 
-<file path=ppt/slides/slide4.xml><?xml version="1.0" encoding="utf-8"?>
-<p:sld xmlns:a="http://schemas.openxmlformats.org/drawingml/2006/main" xmlns:p="http://schemas.openxmlformats.org/presentationml/2006/main" xmlns:r="http://schemas.openxmlformats.org/officeDocument/2006/relationships">
-  <p:cSld>
-    <p:bg>
-      <p:bgPr>
-        <a:solidFill>
-          <a:srgbClr val="6366F1"/>
-        </a:solidFill>
-        <a:effectLst/>
-      </p:bgPr>
-    </p:bg>
-    <p:spTree>
-      <p:nvGrpSpPr>
-        <p:cNvPr id="1" name=""/>
-        <p:cNvGrpSpPr/>
-        <p:nvPr/>
-      </p:nvGrpSpPr>
-      <p:grpSpPr/>
-      <p:sp>
-        <p:nvSpPr>
-          <p:cNvPr id="2" name="TextBox 1"/>
-          <p:cNvSpPr txBox="1"/>
-          <p:nvPr/>
-        </p:nvSpPr>
-        <p:spPr>
-          <a:xfrm>
-            <a:off x="822960" y="2560320"/>
-            <a:ext cx="10515600" cy="1828800"/>
-          </a:xfrm>
-          <a:prstGeom prst="rect">
-            <a:avLst/>
-          </a:prstGeom>
-          <a:noFill/>
-        </p:spPr>
-        <p:txBody>
-          <a:bodyPr wrap="square">
-            <a:spAutoFit/>
-          </a:bodyPr>
-          <a:lstStyle/>
-          <a:p>
-            <a:r>
-              <a:rPr sz="1500" b="1" i="0">
-                <a:solidFill>
-                  <a:srgbClr val="E0E7FF"/>
-                </a:solidFill>
-                <a:latin typeface="Segoe UI"/>
-              </a:rPr>
-              <a:t>THE PROTOTYPE</a:t>
-            </a:r>
-          </a:p>
-          <a:p>
-            <a:r>
-              <a:rPr sz="3400" b="1" i="0">
-                <a:solidFill>
-                  <a:srgbClr val="FFFFFF"/>
-                </a:solidFill>
-                <a:latin typeface="Segoe UI"/>
-              </a:rPr>
-              <a:t>day_9x: five tabs = the first 90 days</a:t>
-            </a:r>
-          </a:p>
-        </p:txBody>
-      </p:sp>
-    </p:spTree>
-  </p:cSld>
-  <p:clrMapOvr>
-    <a:masterClrMapping/>
-  </p:clrMapOvr>
-</p:sld>
-</file>
-
-<file path=ppt/slides/slide5.xml><?xml version="1.0" encoding="utf-8"?>
+<file path=ppt/slides/slide12.xml><?xml version="1.0" encoding="utf-8"?>
 <p:sld xmlns:a="http://schemas.openxmlformats.org/drawingml/2006/main" xmlns:p="http://schemas.openxmlformats.org/presentationml/2006/main" xmlns:r="http://schemas.openxmlformats.org/officeDocument/2006/relationships">
   <p:cSld>
     <p:bg>
@@ -3829,7 +3667,7 @@
                 </a:solidFill>
                 <a:latin typeface="Segoe UI"/>
               </a:rPr>
-              <a:t>The five tabs map to Watkins, mechanism by mechanism</a:t>
+              <a:t>Delivery evidence — built the way the team works</a:t>
             </a:r>
           </a:p>
         </p:txBody>
@@ -3862,13 +3700,13 @@
               </a:spcAft>
             </a:pPr>
             <a:r>
-              <a:rPr sz="1800" b="0" i="0">
-                <a:solidFill>
-                  <a:srgbClr val="6366F1"/>
-                </a:solidFill>
-                <a:latin typeface="Segoe UI"/>
-              </a:rPr>
-              <a:t>•  Charter — the Five Conversations + a STARS situation selector; hiring manager sets duration (default 90 days = 6 sprints, 10 checkpoints).</a:t>
+              <a:rPr sz="1800" b="1" i="0">
+                <a:solidFill>
+                  <a:srgbClr val="0F172A"/>
+                </a:solidFill>
+                <a:latin typeface="Segoe UI"/>
+              </a:rPr>
+              <a:t>•  Jira board (project D9X): 25 stories across 4 sprints, story-first, AI-actual worklogs — importable via JIRA_IMPORT.csv. v0.1 frozen (git tag), v2.0 shipped.</a:t>
             </a:r>
           </a:p>
           <a:p>
@@ -3880,11 +3718,11 @@
             <a:r>
               <a:rPr sz="1800" b="0" i="0">
                 <a:solidFill>
-                  <a:srgbClr val="6366F1"/>
-                </a:solidFill>
-                <a:latin typeface="Segoe UI"/>
-              </a:rPr>
-              <a:t>•  Shadow mode — RAG over the team's runbooks with citations + an abstain guardrail; the cultural-learning moment.</a:t>
+                  <a:srgbClr val="0EA5E9"/>
+                </a:solidFill>
+                <a:latin typeface="Segoe UI"/>
+              </a:rPr>
+              <a:t>•  v2.0 realism, not just narrative: a freshness rule excludes superseded runbooks; an ACL refusal keeps salary/HR out of scope; a retrieval-eval scorecard grades whether the RIGHT knowledge surfaces (most RAG teams run no retrieval evals at all).</a:t>
             </a:r>
           </a:p>
           <a:p>
@@ -3896,11 +3734,11 @@
             <a:r>
               <a:rPr sz="1800" b="0" i="0">
                 <a:solidFill>
-                  <a:srgbClr val="0EA5E9"/>
-                </a:solidFill>
-                <a:latin typeface="Segoe UI"/>
-              </a:rPr>
-              <a:t>•  Early wins — scoped 4–8h tasks behind approval gates; helpful-abstain escalation.</a:t>
+                  <a:srgbClr val="10B981"/>
+                </a:solidFill>
+                <a:latin typeface="Segoe UI"/>
+              </a:rPr>
+              <a:t>•  Tests: 23/23 green. Eval harness: 2 culture gates red uncoached → all green coached (the freshness + ACL cases pass green throughout — they are realism, not the teaching moment).</a:t>
             </a:r>
           </a:p>
           <a:p>
@@ -3910,29 +3748,13 @@
               </a:spcAft>
             </a:pPr>
             <a:r>
-              <a:rPr sz="1800" b="0" i="0">
-                <a:solidFill>
-                  <a:srgbClr val="0EA5E9"/>
-                </a:solidFill>
-                <a:latin typeface="Segoe UI"/>
-              </a:rPr>
-              <a:t>•  Probation review — eval gates per task class; trust earned, not assumed.</a:t>
-            </a:r>
-          </a:p>
-          <a:p>
-            <a:pPr>
-              <a:spcAft>
-                <a:spcPts val="800"/>
-              </a:spcAft>
-            </a:pPr>
-            <a:r>
-              <a:rPr sz="1800" b="0" i="0">
-                <a:solidFill>
-                  <a:srgbClr val="10B981"/>
-                </a:solidFill>
-                <a:latin typeface="Segoe UI"/>
-              </a:rPr>
-              <a:t>•  Breakeven + Retro — value consumed vs created; day-9x stakeholder reports.</a:t>
+              <a:rPr sz="1800" b="1" i="0">
+                <a:solidFill>
+                  <a:srgbClr val="0F172A"/>
+                </a:solidFill>
+                <a:latin typeface="Segoe UI"/>
+              </a:rPr>
+              <a:t>•  Built with a partner-agent team (Opus subagents for docs + an independent review pass, D9X-26); token usage tracked per sprint. GitHub + HF Space deploy ready; push/deploy pending a PAT / HF token supplied at the time (deliberately not stored).</a:t>
             </a:r>
           </a:p>
         </p:txBody>
@@ -3966,7 +3788,7 @@
                 </a:solidFill>
                 <a:latin typeface="Segoe UI"/>
               </a:rPr>
-              <a:t>Runs $0 / keyless (public-Space safe); optional Claude Haiku enriches shadow answers.</a:t>
+              <a:t>Governance rails: synthetic data only; no key on a public Space; Watkins paraphrased with attribution; an independent review documents outcomes in REVIEW_v2.md.</a:t>
             </a:r>
           </a:p>
         </p:txBody>
@@ -3979,7 +3801,128 @@
 </p:sld>
 </file>
 
-<file path=ppt/slides/slide6.xml><?xml version="1.0" encoding="utf-8"?>
+<file path=ppt/slides/slide13.xml><?xml version="1.0" encoding="utf-8"?>
+<p:sld xmlns:a="http://schemas.openxmlformats.org/drawingml/2006/main" xmlns:p="http://schemas.openxmlformats.org/presentationml/2006/main" xmlns:r="http://schemas.openxmlformats.org/officeDocument/2006/relationships">
+  <p:cSld>
+    <p:bg>
+      <p:bgPr>
+        <a:solidFill>
+          <a:srgbClr val="10B981"/>
+        </a:solidFill>
+        <a:effectLst/>
+      </p:bgPr>
+    </p:bg>
+    <p:spTree>
+      <p:nvGrpSpPr>
+        <p:cNvPr id="1" name=""/>
+        <p:cNvGrpSpPr/>
+        <p:nvPr/>
+      </p:nvGrpSpPr>
+      <p:grpSpPr/>
+      <p:sp>
+        <p:nvSpPr>
+          <p:cNvPr id="2" name="TextBox 1"/>
+          <p:cNvSpPr txBox="1"/>
+          <p:nvPr/>
+        </p:nvSpPr>
+        <p:spPr>
+          <a:xfrm>
+            <a:off x="822960" y="2560320"/>
+            <a:ext cx="10515600" cy="1828800"/>
+          </a:xfrm>
+          <a:prstGeom prst="rect">
+            <a:avLst/>
+          </a:prstGeom>
+          <a:noFill/>
+        </p:spPr>
+        <p:txBody>
+          <a:bodyPr wrap="square">
+            <a:spAutoFit/>
+          </a:bodyPr>
+          <a:lstStyle/>
+          <a:p>
+            <a:r>
+              <a:rPr sz="1500" b="1" i="0">
+                <a:solidFill>
+                  <a:srgbClr val="E0E7FF"/>
+                </a:solidFill>
+                <a:latin typeface="Segoe UI"/>
+              </a:rPr>
+              <a:t>THE CLOSE</a:t>
+            </a:r>
+          </a:p>
+          <a:p>
+            <a:r>
+              <a:rPr sz="3400" b="1" i="0">
+                <a:solidFill>
+                  <a:srgbClr val="FFFFFF"/>
+                </a:solidFill>
+                <a:latin typeface="Segoe UI"/>
+              </a:rPr>
+              <a:t>Not a job-loss story — a promotion story</a:t>
+            </a:r>
+          </a:p>
+        </p:txBody>
+      </p:sp>
+      <p:sp>
+        <p:nvSpPr>
+          <p:cNvPr id="3" name="TextBox 2"/>
+          <p:cNvSpPr txBox="1"/>
+          <p:nvPr/>
+        </p:nvSpPr>
+        <p:spPr>
+          <a:xfrm>
+            <a:off x="822960" y="4206240"/>
+            <a:ext cx="10515600" cy="1828800"/>
+          </a:xfrm>
+          <a:prstGeom prst="rect">
+            <a:avLst/>
+          </a:prstGeom>
+          <a:noFill/>
+        </p:spPr>
+        <p:txBody>
+          <a:bodyPr wrap="square">
+            <a:spAutoFit/>
+          </a:bodyPr>
+          <a:lstStyle/>
+          <a:p>
+            <a:r>
+              <a:rPr sz="1800" b="0" i="0">
+                <a:solidFill>
+                  <a:srgbClr val="FFFFFF"/>
+                </a:solidFill>
+                <a:latin typeface="Segoe UI"/>
+              </a:rPr>
+              <a:t>In this story the AI is the junior. Your people are the mentors, the reviewers, the ones who decide. We're applying the management playbook they already trust — to a new kind of teammate.</a:t>
+            </a:r>
+          </a:p>
+          <a:p>
+            <a:pPr>
+              <a:spcBef>
+                <a:spcPts val="1400"/>
+              </a:spcBef>
+            </a:pPr>
+            <a:r>
+              <a:rPr sz="1100" b="0" i="1">
+                <a:solidFill>
+                  <a:srgbClr val="D1FAE5"/>
+                </a:solidFill>
+                <a:latin typeface="Segoe UI"/>
+              </a:rPr>
+              <a:t>Onboarding framework adapted from Michael D. Watkins, *The First 90 Days* (Harvard Business School Press, 2003). Frameworks paraphrased with attribution; no book text reproduced.</a:t>
+            </a:r>
+          </a:p>
+        </p:txBody>
+      </p:sp>
+    </p:spTree>
+  </p:cSld>
+  <p:clrMapOvr>
+    <a:masterClrMapping/>
+  </p:clrMapOvr>
+</p:sld>
+</file>
+
+<file path=ppt/slides/slide2.xml><?xml version="1.0" encoding="utf-8"?>
 <p:sld xmlns:a="http://schemas.openxmlformats.org/drawingml/2006/main" xmlns:p="http://schemas.openxmlformats.org/presentationml/2006/main" xmlns:r="http://schemas.openxmlformats.org/officeDocument/2006/relationships">
   <p:cSld>
     <p:bg>
@@ -4044,7 +3987,7 @@
                 </a:solidFill>
                 <a:latin typeface="Segoe UI"/>
               </a:rPr>
-              <a:t>The money shot: unlocking trapped knowledge in one click</a:t>
+              <a:t>The reframe</a:t>
             </a:r>
           </a:p>
         </p:txBody>
@@ -4083,23 +4026,7 @@
                 </a:solidFill>
                 <a:latin typeface="Segoe UI"/>
               </a:rPr>
-              <a:t>•  Ask Kai: 'Can I rerun the CreditMart load on Thursday morning?'</a:t>
-            </a:r>
-          </a:p>
-          <a:p>
-            <a:pPr lvl="1">
-              <a:spcAft>
-                <a:spcPts val="800"/>
-              </a:spcAft>
-            </a:pPr>
-            <a:r>
-              <a:rPr sz="1600" b="0" i="0">
-                <a:solidFill>
-                  <a:srgbClr val="475569"/>
-                </a:solidFill>
-                <a:latin typeface="Segoe UI"/>
-              </a:rPr>
-              <a:t>–  Before: it can't — the 'Thursday rule' is in nobody's document, only in an SME's head. It answers from the nearest runbook and misses it.</a:t>
+              <a:t>•  An AI agent is the fastest-learning new hire you'll ever get — it reads a million pages before Monday.</a:t>
             </a:r>
           </a:p>
           <a:p>
@@ -4115,23 +4042,7 @@
                 </a:solidFill>
                 <a:latin typeface="Segoe UI"/>
               </a:rPr>
-              <a:t>•  An SME coaches the unwritten rule → it becomes a versioned, cited Skill in the corpus.</a:t>
-            </a:r>
-          </a:p>
-          <a:p>
-            <a:pPr lvl="1">
-              <a:spcAft>
-                <a:spcPts val="800"/>
-              </a:spcAft>
-            </a:pPr>
-            <a:r>
-              <a:rPr sz="1600" b="0" i="0">
-                <a:solidFill>
-                  <a:srgbClr val="10B981"/>
-                </a:solidFill>
-                <a:latin typeface="Segoe UI"/>
-              </a:rPr>
-              <a:t>–  After: Kai answers correctly, citing unwritten_rules.md.</a:t>
+              <a:t>•  And it shows up with zero context about YOUR business: your process, your naming, your unwritten rules.</a:t>
             </a:r>
           </a:p>
           <a:p>
@@ -4147,7 +4058,23 @@
                 </a:solidFill>
                 <a:latin typeface="Segoe UI"/>
               </a:rPr>
-              <a:t>•  The probation-review evals prove it objectively: two culture cases are RED until coached, then GREEN. Evals, not vibes.</a:t>
+              <a:t>•  Talent was never the gap. Context is.</a:t>
+            </a:r>
+          </a:p>
+          <a:p>
+            <a:pPr>
+              <a:spcAft>
+                <a:spcPts val="800"/>
+              </a:spcAft>
+            </a:pPr>
+            <a:r>
+              <a:rPr sz="1800" b="0" i="0">
+                <a:solidFill>
+                  <a:srgbClr val="10B981"/>
+                </a:solidFill>
+                <a:latin typeface="Segoe UI"/>
+              </a:rPr>
+              <a:t>•  So the question isn't 'which model' — it's 'are we a team that knows how to onboard?'</a:t>
             </a:r>
           </a:p>
         </p:txBody>
@@ -4181,6 +4108,690 @@
                 </a:solidFill>
                 <a:latin typeface="Segoe UI"/>
               </a:rPr>
+              <a:t>This is the 'trapped enterprise knowledge' thesis, arriving through the side door.</a:t>
+            </a:r>
+          </a:p>
+        </p:txBody>
+      </p:sp>
+    </p:spTree>
+  </p:cSld>
+  <p:clrMapOvr>
+    <a:masterClrMapping/>
+  </p:clrMapOvr>
+</p:sld>
+</file>
+
+<file path=ppt/slides/slide3.xml><?xml version="1.0" encoding="utf-8"?>
+<p:sld xmlns:a="http://schemas.openxmlformats.org/drawingml/2006/main" xmlns:p="http://schemas.openxmlformats.org/presentationml/2006/main" xmlns:r="http://schemas.openxmlformats.org/officeDocument/2006/relationships">
+  <p:cSld>
+    <p:bg>
+      <p:bgPr>
+        <a:solidFill>
+          <a:srgbClr val="FFFFFF"/>
+        </a:solidFill>
+        <a:effectLst/>
+      </p:bgPr>
+    </p:bg>
+    <p:spTree>
+      <p:nvGrpSpPr>
+        <p:cNvPr id="1" name=""/>
+        <p:cNvGrpSpPr/>
+        <p:nvPr/>
+      </p:nvGrpSpPr>
+      <p:grpSpPr/>
+      <p:sp>
+        <p:nvSpPr>
+          <p:cNvPr id="2" name="Rectangle 1"/>
+          <p:cNvSpPr/>
+          <p:nvPr/>
+        </p:nvSpPr>
+        <p:spPr>
+          <a:xfrm>
+            <a:off x="0" y="0"/>
+            <a:ext cx="12191695" cy="1051560"/>
+          </a:xfrm>
+          <a:prstGeom prst="rect">
+            <a:avLst/>
+          </a:prstGeom>
+          <a:solidFill>
+            <a:srgbClr val="0F172A"/>
+          </a:solidFill>
+          <a:ln>
+            <a:noFill/>
+          </a:ln>
+        </p:spPr>
+        <p:style>
+          <a:lnRef idx="1">
+            <a:schemeClr val="accent1"/>
+          </a:lnRef>
+          <a:fillRef idx="3">
+            <a:schemeClr val="accent1"/>
+          </a:fillRef>
+          <a:effectRef idx="2">
+            <a:schemeClr val="accent1"/>
+          </a:effectRef>
+          <a:fontRef idx="minor">
+            <a:schemeClr val="lt1"/>
+          </a:fontRef>
+        </p:style>
+        <p:txBody>
+          <a:bodyPr rtlCol="0" anchor="ctr" wrap="square" lIns="822960" tIns="256032"/>
+          <a:lstStyle/>
+          <a:p>
+            <a:pPr algn="ctr"/>
+            <a:r>
+              <a:rPr sz="2600" b="1" i="0">
+                <a:solidFill>
+                  <a:srgbClr val="FFFFFF"/>
+                </a:solidFill>
+                <a:latin typeface="Segoe UI"/>
+              </a:rPr>
+              <a:t>Why onboarding — not the model — decides the outcome</a:t>
+            </a:r>
+          </a:p>
+        </p:txBody>
+      </p:sp>
+      <p:sp>
+        <p:nvSpPr>
+          <p:cNvPr id="3" name="TextBox 2"/>
+          <p:cNvSpPr txBox="1"/>
+          <p:nvPr/>
+        </p:nvSpPr>
+        <p:spPr>
+          <a:xfrm>
+            <a:off x="822960" y="1371600"/>
+            <a:ext cx="10515600" cy="4937760"/>
+          </a:xfrm>
+          <a:prstGeom prst="rect">
+            <a:avLst/>
+          </a:prstGeom>
+          <a:noFill/>
+        </p:spPr>
+        <p:txBody>
+          <a:bodyPr wrap="square">
+            <a:spAutoFit/>
+          </a:bodyPr>
+          <a:lstStyle/>
+          <a:p>
+            <a:pPr>
+              <a:spcAft>
+                <a:spcPts val="800"/>
+              </a:spcAft>
+            </a:pPr>
+            <a:r>
+              <a:rPr sz="1800" b="0" i="0">
+                <a:solidFill>
+                  <a:srgbClr val="10B981"/>
+                </a:solidFill>
+                <a:latin typeface="Segoe UI"/>
+              </a:rPr>
+              <a:t>•  Onboarded like a junior teammate (scoped tasks, a reviewing buddy, trust earned task by task): one vendor's merge rate rose 34% → 67% over 18 months.</a:t>
+            </a:r>
+          </a:p>
+          <a:p>
+            <a:pPr>
+              <a:spcAft>
+                <a:spcPts val="800"/>
+              </a:spcAft>
+            </a:pPr>
+            <a:r>
+              <a:rPr sz="1800" b="0" i="0">
+                <a:solidFill>
+                  <a:srgbClr val="EF4444"/>
+                </a:solidFill>
+                <a:latin typeface="Segoe UI"/>
+              </a:rPr>
+              <a:t>•  Thrown in the deep end: an independent trial completed 3 of 20 tasks — the failure cause was silent, unpredictable behaviour, not raw error rate.</a:t>
+            </a:r>
+          </a:p>
+          <a:p>
+            <a:pPr>
+              <a:spcAft>
+                <a:spcPts val="800"/>
+              </a:spcAft>
+            </a:pPr>
+            <a:r>
+              <a:rPr sz="1800" b="1" i="0">
+                <a:solidFill>
+                  <a:srgbClr val="0F172A"/>
+                </a:solidFill>
+                <a:latin typeface="Segoe UI"/>
+              </a:rPr>
+              <a:t>•  Watkins: a mid-level human hire takes ~6.2 months to break even; senior outside hires fail 40–50% of the time. The AI teammate is the ultimate OUTSIDE hire — highest risk, zero informal network — so it needs the MOST structured onboarding, not the least.</a:t>
+            </a:r>
+          </a:p>
+        </p:txBody>
+      </p:sp>
+      <p:sp>
+        <p:nvSpPr>
+          <p:cNvPr id="4" name="TextBox 3"/>
+          <p:cNvSpPr txBox="1"/>
+          <p:nvPr/>
+        </p:nvSpPr>
+        <p:spPr>
+          <a:xfrm>
+            <a:off x="822960" y="6355080"/>
+            <a:ext cx="10515600" cy="365760"/>
+          </a:xfrm>
+          <a:prstGeom prst="rect">
+            <a:avLst/>
+          </a:prstGeom>
+          <a:noFill/>
+        </p:spPr>
+        <p:txBody>
+          <a:bodyPr wrap="square">
+            <a:spAutoFit/>
+          </a:bodyPr>
+          <a:lstStyle/>
+          <a:p>
+            <a:r>
+              <a:rPr sz="1100" b="0" i="1">
+                <a:solidFill>
+                  <a:srgbClr val="475569"/>
+                </a:solidFill>
+                <a:latin typeface="Segoe UI"/>
+              </a:rPr>
+              <a:t>Sources tracked in the POV EVIDENCE file; vendor figures flagged as vendor-reported.</a:t>
+            </a:r>
+          </a:p>
+        </p:txBody>
+      </p:sp>
+    </p:spTree>
+  </p:cSld>
+  <p:clrMapOvr>
+    <a:masterClrMapping/>
+  </p:clrMapOvr>
+</p:sld>
+</file>
+
+<file path=ppt/slides/slide4.xml><?xml version="1.0" encoding="utf-8"?>
+<p:sld xmlns:a="http://schemas.openxmlformats.org/drawingml/2006/main" xmlns:p="http://schemas.openxmlformats.org/presentationml/2006/main" xmlns:r="http://schemas.openxmlformats.org/officeDocument/2006/relationships">
+  <p:cSld>
+    <p:bg>
+      <p:bgPr>
+        <a:solidFill>
+          <a:srgbClr val="6366F1"/>
+        </a:solidFill>
+        <a:effectLst/>
+      </p:bgPr>
+    </p:bg>
+    <p:spTree>
+      <p:nvGrpSpPr>
+        <p:cNvPr id="1" name=""/>
+        <p:cNvGrpSpPr/>
+        <p:nvPr/>
+      </p:nvGrpSpPr>
+      <p:grpSpPr/>
+      <p:sp>
+        <p:nvSpPr>
+          <p:cNvPr id="2" name="TextBox 1"/>
+          <p:cNvSpPr txBox="1"/>
+          <p:nvPr/>
+        </p:nvSpPr>
+        <p:spPr>
+          <a:xfrm>
+            <a:off x="822960" y="2560320"/>
+            <a:ext cx="10515600" cy="1828800"/>
+          </a:xfrm>
+          <a:prstGeom prst="rect">
+            <a:avLst/>
+          </a:prstGeom>
+          <a:noFill/>
+        </p:spPr>
+        <p:txBody>
+          <a:bodyPr wrap="square">
+            <a:spAutoFit/>
+          </a:bodyPr>
+          <a:lstStyle/>
+          <a:p>
+            <a:r>
+              <a:rPr sz="1500" b="1" i="0">
+                <a:solidFill>
+                  <a:srgbClr val="E0E7FF"/>
+                </a:solidFill>
+                <a:latin typeface="Segoe UI"/>
+              </a:rPr>
+              <a:t>THE PROTOTYPE</a:t>
+            </a:r>
+          </a:p>
+          <a:p>
+            <a:r>
+              <a:rPr sz="3400" b="1" i="0">
+                <a:solidFill>
+                  <a:srgbClr val="FFFFFF"/>
+                </a:solidFill>
+                <a:latin typeface="Segoe UI"/>
+              </a:rPr>
+              <a:t>day_9x: five tabs = the first 90 days</a:t>
+            </a:r>
+          </a:p>
+        </p:txBody>
+      </p:sp>
+    </p:spTree>
+  </p:cSld>
+  <p:clrMapOvr>
+    <a:masterClrMapping/>
+  </p:clrMapOvr>
+</p:sld>
+</file>
+
+<file path=ppt/slides/slide5.xml><?xml version="1.0" encoding="utf-8"?>
+<p:sld xmlns:a="http://schemas.openxmlformats.org/drawingml/2006/main" xmlns:p="http://schemas.openxmlformats.org/presentationml/2006/main" xmlns:r="http://schemas.openxmlformats.org/officeDocument/2006/relationships">
+  <p:cSld>
+    <p:bg>
+      <p:bgPr>
+        <a:solidFill>
+          <a:srgbClr val="FFFFFF"/>
+        </a:solidFill>
+        <a:effectLst/>
+      </p:bgPr>
+    </p:bg>
+    <p:spTree>
+      <p:nvGrpSpPr>
+        <p:cNvPr id="1" name=""/>
+        <p:cNvGrpSpPr/>
+        <p:nvPr/>
+      </p:nvGrpSpPr>
+      <p:grpSpPr/>
+      <p:sp>
+        <p:nvSpPr>
+          <p:cNvPr id="2" name="Rectangle 1"/>
+          <p:cNvSpPr/>
+          <p:nvPr/>
+        </p:nvSpPr>
+        <p:spPr>
+          <a:xfrm>
+            <a:off x="0" y="0"/>
+            <a:ext cx="12191695" cy="1051560"/>
+          </a:xfrm>
+          <a:prstGeom prst="rect">
+            <a:avLst/>
+          </a:prstGeom>
+          <a:solidFill>
+            <a:srgbClr val="0F172A"/>
+          </a:solidFill>
+          <a:ln>
+            <a:noFill/>
+          </a:ln>
+        </p:spPr>
+        <p:style>
+          <a:lnRef idx="1">
+            <a:schemeClr val="accent1"/>
+          </a:lnRef>
+          <a:fillRef idx="3">
+            <a:schemeClr val="accent1"/>
+          </a:fillRef>
+          <a:effectRef idx="2">
+            <a:schemeClr val="accent1"/>
+          </a:effectRef>
+          <a:fontRef idx="minor">
+            <a:schemeClr val="lt1"/>
+          </a:fontRef>
+        </p:style>
+        <p:txBody>
+          <a:bodyPr rtlCol="0" anchor="ctr" wrap="square" lIns="822960" tIns="256032"/>
+          <a:lstStyle/>
+          <a:p>
+            <a:pPr algn="ctr"/>
+            <a:r>
+              <a:rPr sz="2600" b="1" i="0">
+                <a:solidFill>
+                  <a:srgbClr val="FFFFFF"/>
+                </a:solidFill>
+                <a:latin typeface="Segoe UI"/>
+              </a:rPr>
+              <a:t>The five tabs map to Watkins, mechanism by mechanism</a:t>
+            </a:r>
+          </a:p>
+        </p:txBody>
+      </p:sp>
+      <p:sp>
+        <p:nvSpPr>
+          <p:cNvPr id="3" name="TextBox 2"/>
+          <p:cNvSpPr txBox="1"/>
+          <p:nvPr/>
+        </p:nvSpPr>
+        <p:spPr>
+          <a:xfrm>
+            <a:off x="822960" y="1371600"/>
+            <a:ext cx="10515600" cy="4937760"/>
+          </a:xfrm>
+          <a:prstGeom prst="rect">
+            <a:avLst/>
+          </a:prstGeom>
+          <a:noFill/>
+        </p:spPr>
+        <p:txBody>
+          <a:bodyPr wrap="square">
+            <a:spAutoFit/>
+          </a:bodyPr>
+          <a:lstStyle/>
+          <a:p>
+            <a:pPr>
+              <a:spcAft>
+                <a:spcPts val="800"/>
+              </a:spcAft>
+            </a:pPr>
+            <a:r>
+              <a:rPr sz="1800" b="0" i="0">
+                <a:solidFill>
+                  <a:srgbClr val="6366F1"/>
+                </a:solidFill>
+                <a:latin typeface="Segoe UI"/>
+              </a:rPr>
+              <a:t>•  Charter — the Five Conversations + a STARS situation selector; hiring manager sets duration (default 90 days = 6 sprints, 10 checkpoints).</a:t>
+            </a:r>
+          </a:p>
+          <a:p>
+            <a:pPr>
+              <a:spcAft>
+                <a:spcPts val="800"/>
+              </a:spcAft>
+            </a:pPr>
+            <a:r>
+              <a:rPr sz="1800" b="0" i="0">
+                <a:solidFill>
+                  <a:srgbClr val="6366F1"/>
+                </a:solidFill>
+                <a:latin typeface="Segoe UI"/>
+              </a:rPr>
+              <a:t>•  Shadow mode — RAG over the team's runbooks with citations + an abstain guardrail; the cultural-learning moment.</a:t>
+            </a:r>
+          </a:p>
+          <a:p>
+            <a:pPr>
+              <a:spcAft>
+                <a:spcPts val="800"/>
+              </a:spcAft>
+            </a:pPr>
+            <a:r>
+              <a:rPr sz="1800" b="0" i="0">
+                <a:solidFill>
+                  <a:srgbClr val="0EA5E9"/>
+                </a:solidFill>
+                <a:latin typeface="Segoe UI"/>
+              </a:rPr>
+              <a:t>•  Early wins — scoped 4–8h tasks behind approval gates; helpful-abstain escalation.</a:t>
+            </a:r>
+          </a:p>
+          <a:p>
+            <a:pPr>
+              <a:spcAft>
+                <a:spcPts val="800"/>
+              </a:spcAft>
+            </a:pPr>
+            <a:r>
+              <a:rPr sz="1800" b="0" i="0">
+                <a:solidFill>
+                  <a:srgbClr val="0EA5E9"/>
+                </a:solidFill>
+                <a:latin typeface="Segoe UI"/>
+              </a:rPr>
+              <a:t>•  Probation review — eval gates per task class; trust earned, not assumed.</a:t>
+            </a:r>
+          </a:p>
+          <a:p>
+            <a:pPr>
+              <a:spcAft>
+                <a:spcPts val="800"/>
+              </a:spcAft>
+            </a:pPr>
+            <a:r>
+              <a:rPr sz="1800" b="0" i="0">
+                <a:solidFill>
+                  <a:srgbClr val="10B981"/>
+                </a:solidFill>
+                <a:latin typeface="Segoe UI"/>
+              </a:rPr>
+              <a:t>•  Breakeven + Retro — value consumed vs created; day-9x stakeholder reports.</a:t>
+            </a:r>
+          </a:p>
+        </p:txBody>
+      </p:sp>
+      <p:sp>
+        <p:nvSpPr>
+          <p:cNvPr id="4" name="TextBox 3"/>
+          <p:cNvSpPr txBox="1"/>
+          <p:nvPr/>
+        </p:nvSpPr>
+        <p:spPr>
+          <a:xfrm>
+            <a:off x="822960" y="6355080"/>
+            <a:ext cx="10515600" cy="365760"/>
+          </a:xfrm>
+          <a:prstGeom prst="rect">
+            <a:avLst/>
+          </a:prstGeom>
+          <a:noFill/>
+        </p:spPr>
+        <p:txBody>
+          <a:bodyPr wrap="square">
+            <a:spAutoFit/>
+          </a:bodyPr>
+          <a:lstStyle/>
+          <a:p>
+            <a:r>
+              <a:rPr sz="1100" b="0" i="1">
+                <a:solidFill>
+                  <a:srgbClr val="475569"/>
+                </a:solidFill>
+                <a:latin typeface="Segoe UI"/>
+              </a:rPr>
+              <a:t>Runs $0 / keyless (public-Space safe); optional Claude Haiku enriches shadow answers.</a:t>
+            </a:r>
+          </a:p>
+        </p:txBody>
+      </p:sp>
+    </p:spTree>
+  </p:cSld>
+  <p:clrMapOvr>
+    <a:masterClrMapping/>
+  </p:clrMapOvr>
+</p:sld>
+</file>
+
+<file path=ppt/slides/slide6.xml><?xml version="1.0" encoding="utf-8"?>
+<p:sld xmlns:a="http://schemas.openxmlformats.org/drawingml/2006/main" xmlns:p="http://schemas.openxmlformats.org/presentationml/2006/main" xmlns:r="http://schemas.openxmlformats.org/officeDocument/2006/relationships">
+  <p:cSld>
+    <p:bg>
+      <p:bgPr>
+        <a:solidFill>
+          <a:srgbClr val="FFFFFF"/>
+        </a:solidFill>
+        <a:effectLst/>
+      </p:bgPr>
+    </p:bg>
+    <p:spTree>
+      <p:nvGrpSpPr>
+        <p:cNvPr id="1" name=""/>
+        <p:cNvGrpSpPr/>
+        <p:nvPr/>
+      </p:nvGrpSpPr>
+      <p:grpSpPr/>
+      <p:sp>
+        <p:nvSpPr>
+          <p:cNvPr id="2" name="Rectangle 1"/>
+          <p:cNvSpPr/>
+          <p:nvPr/>
+        </p:nvSpPr>
+        <p:spPr>
+          <a:xfrm>
+            <a:off x="0" y="0"/>
+            <a:ext cx="12191695" cy="1051560"/>
+          </a:xfrm>
+          <a:prstGeom prst="rect">
+            <a:avLst/>
+          </a:prstGeom>
+          <a:solidFill>
+            <a:srgbClr val="0F172A"/>
+          </a:solidFill>
+          <a:ln>
+            <a:noFill/>
+          </a:ln>
+        </p:spPr>
+        <p:style>
+          <a:lnRef idx="1">
+            <a:schemeClr val="accent1"/>
+          </a:lnRef>
+          <a:fillRef idx="3">
+            <a:schemeClr val="accent1"/>
+          </a:fillRef>
+          <a:effectRef idx="2">
+            <a:schemeClr val="accent1"/>
+          </a:effectRef>
+          <a:fontRef idx="minor">
+            <a:schemeClr val="lt1"/>
+          </a:fontRef>
+        </p:style>
+        <p:txBody>
+          <a:bodyPr rtlCol="0" anchor="ctr" wrap="square" lIns="822960" tIns="256032"/>
+          <a:lstStyle/>
+          <a:p>
+            <a:pPr algn="ctr"/>
+            <a:r>
+              <a:rPr sz="2600" b="1" i="0">
+                <a:solidFill>
+                  <a:srgbClr val="FFFFFF"/>
+                </a:solidFill>
+                <a:latin typeface="Segoe UI"/>
+              </a:rPr>
+              <a:t>The money shot: unlocking trapped knowledge in one click</a:t>
+            </a:r>
+          </a:p>
+        </p:txBody>
+      </p:sp>
+      <p:sp>
+        <p:nvSpPr>
+          <p:cNvPr id="3" name="TextBox 2"/>
+          <p:cNvSpPr txBox="1"/>
+          <p:nvPr/>
+        </p:nvSpPr>
+        <p:spPr>
+          <a:xfrm>
+            <a:off x="822960" y="1371600"/>
+            <a:ext cx="10515600" cy="4937760"/>
+          </a:xfrm>
+          <a:prstGeom prst="rect">
+            <a:avLst/>
+          </a:prstGeom>
+          <a:noFill/>
+        </p:spPr>
+        <p:txBody>
+          <a:bodyPr wrap="square">
+            <a:spAutoFit/>
+          </a:bodyPr>
+          <a:lstStyle/>
+          <a:p>
+            <a:pPr>
+              <a:spcAft>
+                <a:spcPts val="800"/>
+              </a:spcAft>
+            </a:pPr>
+            <a:r>
+              <a:rPr sz="1800" b="1" i="0">
+                <a:solidFill>
+                  <a:srgbClr val="0F172A"/>
+                </a:solidFill>
+                <a:latin typeface="Segoe UI"/>
+              </a:rPr>
+              <a:t>•  Ask Kai: 'Can I rerun the CreditMart load on Thursday morning?'</a:t>
+            </a:r>
+          </a:p>
+          <a:p>
+            <a:pPr lvl="1">
+              <a:spcAft>
+                <a:spcPts val="800"/>
+              </a:spcAft>
+            </a:pPr>
+            <a:r>
+              <a:rPr sz="1600" b="0" i="0">
+                <a:solidFill>
+                  <a:srgbClr val="475569"/>
+                </a:solidFill>
+                <a:latin typeface="Segoe UI"/>
+              </a:rPr>
+              <a:t>–  Before: it can't — the 'Thursday rule' is in nobody's document, only in an SME's head. It answers from the nearest runbook and misses it.</a:t>
+            </a:r>
+          </a:p>
+          <a:p>
+            <a:pPr>
+              <a:spcAft>
+                <a:spcPts val="800"/>
+              </a:spcAft>
+            </a:pPr>
+            <a:r>
+              <a:rPr sz="1800" b="1" i="0">
+                <a:solidFill>
+                  <a:srgbClr val="0F172A"/>
+                </a:solidFill>
+                <a:latin typeface="Segoe UI"/>
+              </a:rPr>
+              <a:t>•  An SME coaches the unwritten rule → it becomes a versioned, cited Skill in the corpus.</a:t>
+            </a:r>
+          </a:p>
+          <a:p>
+            <a:pPr lvl="1">
+              <a:spcAft>
+                <a:spcPts val="800"/>
+              </a:spcAft>
+            </a:pPr>
+            <a:r>
+              <a:rPr sz="1600" b="0" i="0">
+                <a:solidFill>
+                  <a:srgbClr val="10B981"/>
+                </a:solidFill>
+                <a:latin typeface="Segoe UI"/>
+              </a:rPr>
+              <a:t>–  After: Kai answers correctly, citing unwritten_rules.md.</a:t>
+            </a:r>
+          </a:p>
+          <a:p>
+            <a:pPr>
+              <a:spcAft>
+                <a:spcPts val="800"/>
+              </a:spcAft>
+            </a:pPr>
+            <a:r>
+              <a:rPr sz="1800" b="0" i="0">
+                <a:solidFill>
+                  <a:srgbClr val="6366F1"/>
+                </a:solidFill>
+                <a:latin typeface="Segoe UI"/>
+              </a:rPr>
+              <a:t>•  The probation-review evals prove it objectively: two culture cases are RED until coached, then GREEN. Evals, not vibes.</a:t>
+            </a:r>
+          </a:p>
+        </p:txBody>
+      </p:sp>
+      <p:sp>
+        <p:nvSpPr>
+          <p:cNvPr id="4" name="TextBox 3"/>
+          <p:cNvSpPr txBox="1"/>
+          <p:nvPr/>
+        </p:nvSpPr>
+        <p:spPr>
+          <a:xfrm>
+            <a:off x="822960" y="6355080"/>
+            <a:ext cx="10515600" cy="365760"/>
+          </a:xfrm>
+          <a:prstGeom prst="rect">
+            <a:avLst/>
+          </a:prstGeom>
+          <a:noFill/>
+        </p:spPr>
+        <p:txBody>
+          <a:bodyPr wrap="square">
+            <a:spAutoFit/>
+          </a:bodyPr>
+          <a:lstStyle/>
+          <a:p>
+            <a:r>
+              <a:rPr sz="1100" b="0" i="1">
+                <a:solidFill>
+                  <a:srgbClr val="475569"/>
+                </a:solidFill>
+                <a:latin typeface="Segoe UI"/>
+              </a:rPr>
               <a:t>Trapped knowledge → reusable Skill. This is the thesis, made demoable.</a:t>
             </a:r>
           </a:p>
@@ -4195,6 +4806,404 @@
 </file>
 
 <file path=ppt/slides/slide7.xml><?xml version="1.0" encoding="utf-8"?>
+<p:sld xmlns:a="http://schemas.openxmlformats.org/drawingml/2006/main" xmlns:p="http://schemas.openxmlformats.org/presentationml/2006/main" xmlns:r="http://schemas.openxmlformats.org/officeDocument/2006/relationships">
+  <p:cSld>
+    <p:bg>
+      <p:bgPr>
+        <a:solidFill>
+          <a:srgbClr val="FFFFFF"/>
+        </a:solidFill>
+        <a:effectLst/>
+      </p:bgPr>
+    </p:bg>
+    <p:spTree>
+      <p:nvGrpSpPr>
+        <p:cNvPr id="1" name=""/>
+        <p:cNvGrpSpPr/>
+        <p:nvPr/>
+      </p:nvGrpSpPr>
+      <p:grpSpPr/>
+      <p:sp>
+        <p:nvSpPr>
+          <p:cNvPr id="2" name="Rectangle 1"/>
+          <p:cNvSpPr/>
+          <p:nvPr/>
+        </p:nvSpPr>
+        <p:spPr>
+          <a:xfrm>
+            <a:off x="0" y="0"/>
+            <a:ext cx="12191695" cy="1051560"/>
+          </a:xfrm>
+          <a:prstGeom prst="rect">
+            <a:avLst/>
+          </a:prstGeom>
+          <a:solidFill>
+            <a:srgbClr val="0F172A"/>
+          </a:solidFill>
+          <a:ln>
+            <a:noFill/>
+          </a:ln>
+        </p:spPr>
+        <p:style>
+          <a:lnRef idx="1">
+            <a:schemeClr val="accent1"/>
+          </a:lnRef>
+          <a:fillRef idx="3">
+            <a:schemeClr val="accent1"/>
+          </a:fillRef>
+          <a:effectRef idx="2">
+            <a:schemeClr val="accent1"/>
+          </a:effectRef>
+          <a:fontRef idx="minor">
+            <a:schemeClr val="lt1"/>
+          </a:fontRef>
+        </p:style>
+        <p:txBody>
+          <a:bodyPr rtlCol="0" anchor="ctr" wrap="square" lIns="822960" tIns="256032"/>
+          <a:lstStyle/>
+          <a:p>
+            <a:pPr algn="ctr"/>
+            <a:r>
+              <a:rPr sz="2600" b="1" i="0">
+                <a:solidFill>
+                  <a:srgbClr val="FFFFFF"/>
+                </a:solidFill>
+                <a:latin typeface="Segoe UI"/>
+              </a:rPr>
+              <a:t>The second money shot: Kai mines what the corpus can't answer</a:t>
+            </a:r>
+          </a:p>
+        </p:txBody>
+      </p:sp>
+      <p:sp>
+        <p:nvSpPr>
+          <p:cNvPr id="3" name="TextBox 2"/>
+          <p:cNvSpPr txBox="1"/>
+          <p:nvPr/>
+        </p:nvSpPr>
+        <p:spPr>
+          <a:xfrm>
+            <a:off x="822960" y="1371600"/>
+            <a:ext cx="10515600" cy="4937760"/>
+          </a:xfrm>
+          <a:prstGeom prst="rect">
+            <a:avLst/>
+          </a:prstGeom>
+          <a:noFill/>
+        </p:spPr>
+        <p:txBody>
+          <a:bodyPr wrap="square">
+            <a:spAutoFit/>
+          </a:bodyPr>
+          <a:lstStyle/>
+          <a:p>
+            <a:pPr>
+              <a:spcAft>
+                <a:spcPts val="800"/>
+              </a:spcAft>
+            </a:pPr>
+            <a:r>
+              <a:rPr sz="1800" b="1" i="0">
+                <a:solidFill>
+                  <a:srgbClr val="0F172A"/>
+                </a:solidFill>
+                <a:latin typeface="Segoe UI"/>
+              </a:rPr>
+              <a:t>•  When Kai can't answer, the miss isn't lost — it's logged as a structured knowledge gap (a mining lead), never a silent hallucination.</a:t>
+            </a:r>
+          </a:p>
+          <a:p>
+            <a:pPr>
+              <a:spcAft>
+                <a:spcPts val="800"/>
+              </a:spcAft>
+            </a:pPr>
+            <a:r>
+              <a:rPr sz="1800" b="0" i="0">
+                <a:solidFill>
+                  <a:srgbClr val="6366F1"/>
+                </a:solidFill>
+                <a:latin typeface="Segoe UI"/>
+              </a:rPr>
+              <a:t>•  Kai turns the gap into SME interview questions; the SME answers; Kai writes it up as a versioned, ATTRIBUTED Skill and reindexes — the question it abstained on now answers, with a citation.</a:t>
+            </a:r>
+          </a:p>
+          <a:p>
+            <a:pPr>
+              <a:spcAft>
+                <a:spcPts val="800"/>
+              </a:spcAft>
+            </a:pPr>
+            <a:r>
+              <a:rPr sz="1800" b="1" i="0">
+                <a:solidFill>
+                  <a:srgbClr val="0F172A"/>
+                </a:solidFill>
+                <a:latin typeface="Segoe UI"/>
+              </a:rPr>
+              <a:t>•  This is agent-led externalization: the 80% that was never written down gets captured by interviewing the human who has it (research: 94.9% recall in simulation), and the SME is the credited teacher — never an extraction target.</a:t>
+            </a:r>
+          </a:p>
+          <a:p>
+            <a:pPr>
+              <a:spcAft>
+                <a:spcPts val="800"/>
+              </a:spcAft>
+            </a:pPr>
+            <a:r>
+              <a:rPr sz="1800" b="0" i="0">
+                <a:solidFill>
+                  <a:srgbClr val="10B981"/>
+                </a:solidFill>
+                <a:latin typeface="Segoe UI"/>
+              </a:rPr>
+              <a:t>•  Almost nobody demos this. It is exactly the tacit-knowledge loop the POV names as the prototype opportunity.</a:t>
+            </a:r>
+          </a:p>
+        </p:txBody>
+      </p:sp>
+      <p:sp>
+        <p:nvSpPr>
+          <p:cNvPr id="4" name="TextBox 3"/>
+          <p:cNvSpPr txBox="1"/>
+          <p:nvPr/>
+        </p:nvSpPr>
+        <p:spPr>
+          <a:xfrm>
+            <a:off x="822960" y="6355080"/>
+            <a:ext cx="10515600" cy="365760"/>
+          </a:xfrm>
+          <a:prstGeom prst="rect">
+            <a:avLst/>
+          </a:prstGeom>
+          <a:noFill/>
+        </p:spPr>
+        <p:txBody>
+          <a:bodyPr wrap="square">
+            <a:spAutoFit/>
+          </a:bodyPr>
+          <a:lstStyle/>
+          <a:p>
+            <a:r>
+              <a:rPr sz="1100" b="0" i="1">
+                <a:solidFill>
+                  <a:srgbClr val="475569"/>
+                </a:solidFill>
+                <a:latin typeface="Segoe UI"/>
+              </a:rPr>
+              <a:t>Gap register → SME interview → cited, versioned Skill. Trapped knowledge, unlocked with consent and attribution.</a:t>
+            </a:r>
+          </a:p>
+        </p:txBody>
+      </p:sp>
+    </p:spTree>
+  </p:cSld>
+  <p:clrMapOvr>
+    <a:masterClrMapping/>
+  </p:clrMapOvr>
+</p:sld>
+</file>
+
+<file path=ppt/slides/slide8.xml><?xml version="1.0" encoding="utf-8"?>
+<p:sld xmlns:a="http://schemas.openxmlformats.org/drawingml/2006/main" xmlns:p="http://schemas.openxmlformats.org/presentationml/2006/main" xmlns:r="http://schemas.openxmlformats.org/officeDocument/2006/relationships">
+  <p:cSld>
+    <p:bg>
+      <p:bgPr>
+        <a:solidFill>
+          <a:srgbClr val="FFFFFF"/>
+        </a:solidFill>
+        <a:effectLst/>
+      </p:bgPr>
+    </p:bg>
+    <p:spTree>
+      <p:nvGrpSpPr>
+        <p:cNvPr id="1" name=""/>
+        <p:cNvGrpSpPr/>
+        <p:nvPr/>
+      </p:nvGrpSpPr>
+      <p:grpSpPr/>
+      <p:sp>
+        <p:nvSpPr>
+          <p:cNvPr id="2" name="Rectangle 1"/>
+          <p:cNvSpPr/>
+          <p:nvPr/>
+        </p:nvSpPr>
+        <p:spPr>
+          <a:xfrm>
+            <a:off x="0" y="0"/>
+            <a:ext cx="12191695" cy="1051560"/>
+          </a:xfrm>
+          <a:prstGeom prst="rect">
+            <a:avLst/>
+          </a:prstGeom>
+          <a:solidFill>
+            <a:srgbClr val="0F172A"/>
+          </a:solidFill>
+          <a:ln>
+            <a:noFill/>
+          </a:ln>
+        </p:spPr>
+        <p:style>
+          <a:lnRef idx="1">
+            <a:schemeClr val="accent1"/>
+          </a:lnRef>
+          <a:fillRef idx="3">
+            <a:schemeClr val="accent1"/>
+          </a:fillRef>
+          <a:effectRef idx="2">
+            <a:schemeClr val="accent1"/>
+          </a:effectRef>
+          <a:fontRef idx="minor">
+            <a:schemeClr val="lt1"/>
+          </a:fontRef>
+        </p:style>
+        <p:txBody>
+          <a:bodyPr rtlCol="0" anchor="ctr" wrap="square" lIns="822960" tIns="256032"/>
+          <a:lstStyle/>
+          <a:p>
+            <a:pPr algn="ctr"/>
+            <a:r>
+              <a:rPr sz="2600" b="1" i="0">
+                <a:solidFill>
+                  <a:srgbClr val="FFFFFF"/>
+                </a:solidFill>
+                <a:latin typeface="Segoe UI"/>
+              </a:rPr>
+              <a:t>Teachers of the sprint — why attribution is the whole game</a:t>
+            </a:r>
+          </a:p>
+        </p:txBody>
+      </p:sp>
+      <p:sp>
+        <p:nvSpPr>
+          <p:cNvPr id="3" name="TextBox 2"/>
+          <p:cNvSpPr txBox="1"/>
+          <p:nvPr/>
+        </p:nvSpPr>
+        <p:spPr>
+          <a:xfrm>
+            <a:off x="822960" y="1371600"/>
+            <a:ext cx="10515600" cy="4937760"/>
+          </a:xfrm>
+          <a:prstGeom prst="rect">
+            <a:avLst/>
+          </a:prstGeom>
+          <a:noFill/>
+        </p:spPr>
+        <p:txBody>
+          <a:bodyPr wrap="square">
+            <a:spAutoFit/>
+          </a:bodyPr>
+          <a:lstStyle/>
+          <a:p>
+            <a:pPr>
+              <a:spcAft>
+                <a:spcPts val="800"/>
+              </a:spcAft>
+            </a:pPr>
+            <a:r>
+              <a:rPr sz="1800" b="0" i="0">
+                <a:solidFill>
+                  <a:srgbClr val="EF4444"/>
+                </a:solidFill>
+                <a:latin typeface="Segoe UI"/>
+              </a:rPr>
+              <a:t>•  35% of knowledge workers deliberately hoard expertise to stay indispensable in the AI era; AI awareness measurably increases knowledge-hiding.</a:t>
+            </a:r>
+          </a:p>
+          <a:p>
+            <a:pPr>
+              <a:spcAft>
+                <a:spcPts val="800"/>
+              </a:spcAft>
+            </a:pPr>
+            <a:r>
+              <a:rPr sz="1800" b="1" i="0">
+                <a:solidFill>
+                  <a:srgbClr val="0F172A"/>
+                </a:solidFill>
+                <a:latin typeface="Segoe UI"/>
+              </a:rPr>
+              <a:t>•  So a program pitched as 'we'll capture the SMEs' knowledge' poisons its own corpus. The fix is design, not sentiment: SMEs as named, credited teachers.</a:t>
+            </a:r>
+          </a:p>
+          <a:p>
+            <a:pPr>
+              <a:spcAft>
+                <a:spcPts val="800"/>
+              </a:spcAft>
+            </a:pPr>
+            <a:r>
+              <a:rPr sz="1800" b="0" i="0">
+                <a:solidFill>
+                  <a:srgbClr val="6366F1"/>
+                </a:solidFill>
+                <a:latin typeface="Segoe UI"/>
+              </a:rPr>
+              <a:t>•  day_9x makes it visible — a 'Teachers of the sprint' board counts Skills coached and citations served per SME: 'your knowledge answered N questions this sprint.'</a:t>
+            </a:r>
+          </a:p>
+          <a:p>
+            <a:pPr>
+              <a:spcAft>
+                <a:spcPts val="800"/>
+              </a:spcAft>
+            </a:pPr>
+            <a:r>
+              <a:rPr sz="1800" b="0" i="0">
+                <a:solidFill>
+                  <a:srgbClr val="10B981"/>
+                </a:solidFill>
+                <a:latin typeface="Segoe UI"/>
+              </a:rPr>
+              <a:t>•  Where AI is embedded well, 48% of workers feel energized vs 19% without. Attribution is corpus-quality engineering.</a:t>
+            </a:r>
+          </a:p>
+        </p:txBody>
+      </p:sp>
+      <p:sp>
+        <p:nvSpPr>
+          <p:cNvPr id="4" name="TextBox 3"/>
+          <p:cNvSpPr txBox="1"/>
+          <p:nvPr/>
+        </p:nvSpPr>
+        <p:spPr>
+          <a:xfrm>
+            <a:off x="822960" y="6355080"/>
+            <a:ext cx="10515600" cy="365760"/>
+          </a:xfrm>
+          <a:prstGeom prst="rect">
+            <a:avLst/>
+          </a:prstGeom>
+          <a:noFill/>
+        </p:spPr>
+        <p:txBody>
+          <a:bodyPr wrap="square">
+            <a:spAutoFit/>
+          </a:bodyPr>
+          <a:lstStyle/>
+          <a:p>
+            <a:r>
+              <a:rPr sz="1100" b="0" i="1">
+                <a:solidFill>
+                  <a:srgbClr val="475569"/>
+                </a:solidFill>
+                <a:latin typeface="Segoe UI"/>
+              </a:rPr>
+              <a:t>The 'one team' framing isn't a slogan — it's what keeps the knowledge flowing in.</a:t>
+            </a:r>
+          </a:p>
+        </p:txBody>
+      </p:sp>
+    </p:spTree>
+  </p:cSld>
+  <p:clrMapOvr>
+    <a:masterClrMapping/>
+  </p:clrMapOvr>
+</p:sld>
+</file>
+
+<file path=ppt/slides/slide9.xml><?xml version="1.0" encoding="utf-8"?>
 <p:sld xmlns:a="http://schemas.openxmlformats.org/drawingml/2006/main" xmlns:p="http://schemas.openxmlformats.org/presentationml/2006/main" xmlns:r="http://schemas.openxmlformats.org/officeDocument/2006/relationships">
   <p:cSld>
     <p:bg>
@@ -4476,404 +5485,6 @@
                 <a:latin typeface="Segoe UI"/>
               </a:rPr>
               <a:t>The STARS situation visibly changes WHEN the AI teammate pays back its onboarding cost. Net at day 90 (turnaround): +403 analyst-hours. The curve dips through shadow (drafts create no realized value — the human still owns the work), then climbs as scoped work is approved.</a:t>
-            </a:r>
-          </a:p>
-        </p:txBody>
-      </p:sp>
-    </p:spTree>
-  </p:cSld>
-  <p:clrMapOvr>
-    <a:masterClrMapping/>
-  </p:clrMapOvr>
-</p:sld>
-</file>
-
-<file path=ppt/slides/slide8.xml><?xml version="1.0" encoding="utf-8"?>
-<p:sld xmlns:a="http://schemas.openxmlformats.org/drawingml/2006/main" xmlns:p="http://schemas.openxmlformats.org/presentationml/2006/main" xmlns:r="http://schemas.openxmlformats.org/officeDocument/2006/relationships">
-  <p:cSld>
-    <p:bg>
-      <p:bgPr>
-        <a:solidFill>
-          <a:srgbClr val="FFFFFF"/>
-        </a:solidFill>
-        <a:effectLst/>
-      </p:bgPr>
-    </p:bg>
-    <p:spTree>
-      <p:nvGrpSpPr>
-        <p:cNvPr id="1" name=""/>
-        <p:cNvGrpSpPr/>
-        <p:nvPr/>
-      </p:nvGrpSpPr>
-      <p:grpSpPr/>
-      <p:sp>
-        <p:nvSpPr>
-          <p:cNvPr id="2" name="Rectangle 1"/>
-          <p:cNvSpPr/>
-          <p:nvPr/>
-        </p:nvSpPr>
-        <p:spPr>
-          <a:xfrm>
-            <a:off x="0" y="0"/>
-            <a:ext cx="12191695" cy="1051560"/>
-          </a:xfrm>
-          <a:prstGeom prst="rect">
-            <a:avLst/>
-          </a:prstGeom>
-          <a:solidFill>
-            <a:srgbClr val="0F172A"/>
-          </a:solidFill>
-          <a:ln>
-            <a:noFill/>
-          </a:ln>
-        </p:spPr>
-        <p:style>
-          <a:lnRef idx="1">
-            <a:schemeClr val="accent1"/>
-          </a:lnRef>
-          <a:fillRef idx="3">
-            <a:schemeClr val="accent1"/>
-          </a:fillRef>
-          <a:effectRef idx="2">
-            <a:schemeClr val="accent1"/>
-          </a:effectRef>
-          <a:fontRef idx="minor">
-            <a:schemeClr val="lt1"/>
-          </a:fontRef>
-        </p:style>
-        <p:txBody>
-          <a:bodyPr rtlCol="0" anchor="ctr" wrap="square" lIns="822960" tIns="256032"/>
-          <a:lstStyle/>
-          <a:p>
-            <a:pPr algn="ctr"/>
-            <a:r>
-              <a:rPr sz="2600" b="1" i="0">
-                <a:solidFill>
-                  <a:srgbClr val="FFFFFF"/>
-                </a:solidFill>
-                <a:latin typeface="Segoe UI"/>
-              </a:rPr>
-              <a:t>Trust is earned per task class — and revocable</a:t>
-            </a:r>
-          </a:p>
-        </p:txBody>
-      </p:sp>
-      <p:sp>
-        <p:nvSpPr>
-          <p:cNvPr id="3" name="TextBox 2"/>
-          <p:cNvSpPr txBox="1"/>
-          <p:nvPr/>
-        </p:nvSpPr>
-        <p:spPr>
-          <a:xfrm>
-            <a:off x="822960" y="1371600"/>
-            <a:ext cx="10515600" cy="4937760"/>
-          </a:xfrm>
-          <a:prstGeom prst="rect">
-            <a:avLst/>
-          </a:prstGeom>
-          <a:noFill/>
-        </p:spPr>
-        <p:txBody>
-          <a:bodyPr wrap="square">
-            <a:spAutoFit/>
-          </a:bodyPr>
-          <a:lstStyle/>
-          <a:p>
-            <a:pPr>
-              <a:spcAft>
-                <a:spcPts val="800"/>
-              </a:spcAft>
-            </a:pPr>
-            <a:r>
-              <a:rPr sz="1800" b="0" i="0">
-                <a:solidFill>
-                  <a:srgbClr val="6366F1"/>
-                </a:solidFill>
-                <a:latin typeface="Segoe UI"/>
-              </a:rPr>
-              <a:t>•  SHADOW — drafts only, 100% reviewed, zero autonomy.</a:t>
-            </a:r>
-          </a:p>
-          <a:p>
-            <a:pPr>
-              <a:spcAft>
-                <a:spcPts val="800"/>
-              </a:spcAft>
-            </a:pPr>
-            <a:r>
-              <a:rPr sz="1800" b="0" i="0">
-                <a:solidFill>
-                  <a:srgbClr val="0EA5E9"/>
-                </a:solidFill>
-                <a:latin typeface="Segoe UI"/>
-              </a:rPr>
-              <a:t>•  GATED — may act, but every output needs the buddy's approval; unlocked when the class passes its eval gate.</a:t>
-            </a:r>
-          </a:p>
-          <a:p>
-            <a:pPr>
-              <a:spcAft>
-                <a:spcPts val="800"/>
-              </a:spcAft>
-            </a:pPr>
-            <a:r>
-              <a:rPr sz="1800" b="0" i="0">
-                <a:solidFill>
-                  <a:srgbClr val="10B981"/>
-                </a:solidFill>
-                <a:latin typeface="Segoe UI"/>
-              </a:rPr>
-              <a:t>•  AUTONOMOUS — acts within the charter; ~20% audit sample; offered only with a green gate AND enough verified outputs.</a:t>
-            </a:r>
-          </a:p>
-          <a:p>
-            <a:pPr>
-              <a:spcAft>
-                <a:spcPts val="800"/>
-              </a:spcAft>
-            </a:pPr>
-            <a:r>
-              <a:rPr sz="1800" b="1" i="0">
-                <a:solidFill>
-                  <a:srgbClr val="0F172A"/>
-                </a:solidFill>
-                <a:latin typeface="Segoe UI"/>
-              </a:rPr>
-              <a:t>•  A human junior earns social trust; an agent earns statistical trust. The probation review can expand, hold, or reduce — the same 90-day decision you'd make for a person.</a:t>
-            </a:r>
-          </a:p>
-        </p:txBody>
-      </p:sp>
-      <p:sp>
-        <p:nvSpPr>
-          <p:cNvPr id="4" name="TextBox 3"/>
-          <p:cNvSpPr txBox="1"/>
-          <p:nvPr/>
-        </p:nvSpPr>
-        <p:spPr>
-          <a:xfrm>
-            <a:off x="822960" y="6355080"/>
-            <a:ext cx="10515600" cy="365760"/>
-          </a:xfrm>
-          <a:prstGeom prst="rect">
-            <a:avLst/>
-          </a:prstGeom>
-          <a:noFill/>
-        </p:spPr>
-        <p:txBody>
-          <a:bodyPr wrap="square">
-            <a:spAutoFit/>
-          </a:bodyPr>
-          <a:lstStyle/>
-          <a:p>
-            <a:r>
-              <a:rPr sz="1100" b="0" i="1">
-                <a:solidFill>
-                  <a:srgbClr val="475569"/>
-                </a:solidFill>
-                <a:latin typeface="Segoe UI"/>
-              </a:rPr>
-              <a:t>What stays human, in writing: regulatory sign-off, stakeholder calls, ambiguous judgement, accountability.</a:t>
-            </a:r>
-          </a:p>
-        </p:txBody>
-      </p:sp>
-    </p:spTree>
-  </p:cSld>
-  <p:clrMapOvr>
-    <a:masterClrMapping/>
-  </p:clrMapOvr>
-</p:sld>
-</file>
-
-<file path=ppt/slides/slide9.xml><?xml version="1.0" encoding="utf-8"?>
-<p:sld xmlns:a="http://schemas.openxmlformats.org/drawingml/2006/main" xmlns:p="http://schemas.openxmlformats.org/presentationml/2006/main" xmlns:r="http://schemas.openxmlformats.org/officeDocument/2006/relationships">
-  <p:cSld>
-    <p:bg>
-      <p:bgPr>
-        <a:solidFill>
-          <a:srgbClr val="FFFFFF"/>
-        </a:solidFill>
-        <a:effectLst/>
-      </p:bgPr>
-    </p:bg>
-    <p:spTree>
-      <p:nvGrpSpPr>
-        <p:cNvPr id="1" name=""/>
-        <p:cNvGrpSpPr/>
-        <p:nvPr/>
-      </p:nvGrpSpPr>
-      <p:grpSpPr/>
-      <p:sp>
-        <p:nvSpPr>
-          <p:cNvPr id="2" name="Rectangle 1"/>
-          <p:cNvSpPr/>
-          <p:nvPr/>
-        </p:nvSpPr>
-        <p:spPr>
-          <a:xfrm>
-            <a:off x="0" y="0"/>
-            <a:ext cx="12191695" cy="1051560"/>
-          </a:xfrm>
-          <a:prstGeom prst="rect">
-            <a:avLst/>
-          </a:prstGeom>
-          <a:solidFill>
-            <a:srgbClr val="0F172A"/>
-          </a:solidFill>
-          <a:ln>
-            <a:noFill/>
-          </a:ln>
-        </p:spPr>
-        <p:style>
-          <a:lnRef idx="1">
-            <a:schemeClr val="accent1"/>
-          </a:lnRef>
-          <a:fillRef idx="3">
-            <a:schemeClr val="accent1"/>
-          </a:fillRef>
-          <a:effectRef idx="2">
-            <a:schemeClr val="accent1"/>
-          </a:effectRef>
-          <a:fontRef idx="minor">
-            <a:schemeClr val="lt1"/>
-          </a:fontRef>
-        </p:style>
-        <p:txBody>
-          <a:bodyPr rtlCol="0" anchor="ctr" wrap="square" lIns="822960" tIns="256032"/>
-          <a:lstStyle/>
-          <a:p>
-            <a:pPr algn="ctr"/>
-            <a:r>
-              <a:rPr sz="2600" b="1" i="0">
-                <a:solidFill>
-                  <a:srgbClr val="FFFFFF"/>
-                </a:solidFill>
-                <a:latin typeface="Segoe UI"/>
-              </a:rPr>
-              <a:t>Delivery evidence — built the way the team works</a:t>
-            </a:r>
-          </a:p>
-        </p:txBody>
-      </p:sp>
-      <p:sp>
-        <p:nvSpPr>
-          <p:cNvPr id="3" name="TextBox 2"/>
-          <p:cNvSpPr txBox="1"/>
-          <p:nvPr/>
-        </p:nvSpPr>
-        <p:spPr>
-          <a:xfrm>
-            <a:off x="822960" y="1371600"/>
-            <a:ext cx="10515600" cy="4937760"/>
-          </a:xfrm>
-          <a:prstGeom prst="rect">
-            <a:avLst/>
-          </a:prstGeom>
-          <a:noFill/>
-        </p:spPr>
-        <p:txBody>
-          <a:bodyPr wrap="square">
-            <a:spAutoFit/>
-          </a:bodyPr>
-          <a:lstStyle/>
-          <a:p>
-            <a:pPr>
-              <a:spcAft>
-                <a:spcPts val="800"/>
-              </a:spcAft>
-            </a:pPr>
-            <a:r>
-              <a:rPr sz="1800" b="1" i="0">
-                <a:solidFill>
-                  <a:srgbClr val="0F172A"/>
-                </a:solidFill>
-                <a:latin typeface="Segoe UI"/>
-              </a:rPr>
-              <a:t>•  Jira board (project D9X): 15 stories across 2 sprints, story-first, AI-actual worklogs — importable via JIRA_IMPORT.csv. 13 Done, 2 blocked on a human credential.</a:t>
-            </a:r>
-          </a:p>
-          <a:p>
-            <a:pPr>
-              <a:spcAft>
-                <a:spcPts val="800"/>
-              </a:spcAft>
-            </a:pPr>
-            <a:r>
-              <a:rPr sz="1800" b="1" i="0">
-                <a:solidFill>
-                  <a:srgbClr val="0F172A"/>
-                </a:solidFill>
-                <a:latin typeface="Segoe UI"/>
-              </a:rPr>
-              <a:t>•  Sprint cadence documented: 15-day sprints pace the work; 9-day day-9x checkpoints pace stakeholder communication; they share the day-90 endpoint.</a:t>
-            </a:r>
-          </a:p>
-          <a:p>
-            <a:pPr>
-              <a:spcAft>
-                <a:spcPts val="800"/>
-              </a:spcAft>
-            </a:pPr>
-            <a:r>
-              <a:rPr sz="1800" b="0" i="0">
-                <a:solidFill>
-                  <a:srgbClr val="10B981"/>
-                </a:solidFill>
-                <a:latin typeface="Segoe UI"/>
-              </a:rPr>
-              <a:t>•  Tests: 15/15 green. Eval harness: 2 culture gates red uncoached → all green coached.</a:t>
-            </a:r>
-          </a:p>
-          <a:p>
-            <a:pPr>
-              <a:spcAft>
-                <a:spcPts val="800"/>
-              </a:spcAft>
-            </a:pPr>
-            <a:r>
-              <a:rPr sz="1800" b="1" i="0">
-                <a:solidFill>
-                  <a:srgbClr val="0F172A"/>
-                </a:solidFill>
-                <a:latin typeface="Segoe UI"/>
-              </a:rPr>
-              <a:t>•  GitHub evidence repo + public HuggingFace Space ($0 keyless) — deploy steps ready; push/deploy pending a PAT / HF token supplied at the time (deliberately not stored).</a:t>
-            </a:r>
-          </a:p>
-        </p:txBody>
-      </p:sp>
-      <p:sp>
-        <p:nvSpPr>
-          <p:cNvPr id="4" name="TextBox 3"/>
-          <p:cNvSpPr txBox="1"/>
-          <p:nvPr/>
-        </p:nvSpPr>
-        <p:spPr>
-          <a:xfrm>
-            <a:off x="822960" y="6355080"/>
-            <a:ext cx="10515600" cy="365760"/>
-          </a:xfrm>
-          <a:prstGeom prst="rect">
-            <a:avLst/>
-          </a:prstGeom>
-          <a:noFill/>
-        </p:spPr>
-        <p:txBody>
-          <a:bodyPr wrap="square">
-            <a:spAutoFit/>
-          </a:bodyPr>
-          <a:lstStyle/>
-          <a:p>
-            <a:r>
-              <a:rPr sz="1100" b="0" i="1">
-                <a:solidFill>
-                  <a:srgbClr val="475569"/>
-                </a:solidFill>
-                <a:latin typeface="Segoe UI"/>
-              </a:rPr>
-              <a:t>Governance rails: synthetic data only; no key on a public Space; Watkins paraphrased with attribution.</a:t>
             </a:r>
           </a:p>
         </p:txBody>

--- a/day_9x_stakeholder_deck.pptx
+++ b/day_9x_stakeholder_deck.pptx
@@ -3507,7 +3507,7 @@
                 </a:solidFill>
                 <a:latin typeface="Segoe UI"/>
               </a:rPr>
-              <a:t>•  In this story the AI is the junior; the humans are the mentors, reviewers and deciders. Every hour Kai returns is redeployed toward the review-and-judgement work that was always understaffed.</a:t>
+              <a:t>•  In this story the AI is the junior; the humans are the mentors, reviewers and deciders. Every hour Arjuna returns is redeployed toward the review-and-judgement work that was always understaffed.</a:t>
             </a:r>
           </a:p>
           <a:p>
@@ -3523,7 +3523,7 @@
                 </a:solidFill>
                 <a:latin typeface="Segoe UI"/>
               </a:rPr>
-              <a:t>•  Over a modelled turnaround run, Kai returns ~432 analyst-hours to named teammates — Priya (triage), Arun (recon), Sofia (DQ) — who shift from doing the routine work to reviewing and directing it.</a:t>
+              <a:t>•  Over a modelled turnaround run, Arjuna returns ~432 analyst-hours to named teammates — Priya (triage), Arun (recon), Sofia (DQ) — who shift from doing the routine work to reviewing and directing it.</a:t>
             </a:r>
           </a:p>
           <a:p>
@@ -4694,7 +4694,7 @@
                 </a:solidFill>
                 <a:latin typeface="Segoe UI"/>
               </a:rPr>
-              <a:t>•  Ask Kai: 'Can I rerun the CreditMart load on Thursday morning?'</a:t>
+              <a:t>•  Ask Arjuna: 'Can I rerun the CreditMart load on Thursday morning?'</a:t>
             </a:r>
           </a:p>
           <a:p>
@@ -4742,7 +4742,7 @@
                 </a:solidFill>
                 <a:latin typeface="Segoe UI"/>
               </a:rPr>
-              <a:t>–  After: Kai answers correctly, citing unwritten_rules.md.</a:t>
+              <a:t>–  After: Arjuna answers correctly, citing unwritten_rules.md.</a:t>
             </a:r>
           </a:p>
           <a:p>
@@ -4870,7 +4870,7 @@
                 </a:solidFill>
                 <a:latin typeface="Segoe UI"/>
               </a:rPr>
-              <a:t>The second money shot: Kai mines what the corpus can't answer</a:t>
+              <a:t>The second money shot: Arjuna mines what the corpus can't answer</a:t>
             </a:r>
           </a:p>
         </p:txBody>
@@ -4909,7 +4909,7 @@
                 </a:solidFill>
                 <a:latin typeface="Segoe UI"/>
               </a:rPr>
-              <a:t>•  When Kai can't answer, the miss isn't lost — it's logged as a structured knowledge gap (a mining lead), never a silent hallucination.</a:t>
+              <a:t>•  When Arjuna can't answer, the miss isn't lost — it's logged as a structured knowledge gap (a mining lead), never a silent hallucination.</a:t>
             </a:r>
           </a:p>
           <a:p>
@@ -4925,7 +4925,7 @@
                 </a:solidFill>
                 <a:latin typeface="Segoe UI"/>
               </a:rPr>
-              <a:t>•  Kai turns the gap into SME interview questions; the SME answers; Kai writes it up as a versioned, ATTRIBUTED Skill and reindexes — the question it abstained on now answers, with a citation.</a:t>
+              <a:t>•  Arjuna turns the gap into SME interview questions; the SME answers; Arjuna writes it up as a versioned, ATTRIBUTED Skill and reindexes — the question it abstained on now answers, with a citation.</a:t>
             </a:r>
           </a:p>
           <a:p>
